--- a/modulo-02/02.05 - Melhorando a Performance de Tabelas Internas/02.05_Melhorando_a_performance_de_tabelas_internas.pptx
+++ b/modulo-02/02.05 - Melhorando a Performance de Tabelas Internas/02.05_Melhorando_a_performance_de_tabelas_internas.pptx
@@ -1639,7 +1639,7 @@
                   <a:srgbClr val="8FA3C7"/>
                 </a:solidFill>
               </a:rPr>
-              <a:t>ABAP Moderno · Módulo 04 — Programação ABAP Intermediária  ·  Aula 5 de 9 — Performance de tabelas</a:t>
+              <a:t>ABAP Moderno · Módulo 02 — Programação ABAP Intermediária  ·  Aula 5 de 9 — Performance de tabelas</a:t>
             </a:r>
             <a:endParaRPr lang="en-US" sz="900" dirty="0"/>
           </a:p>
@@ -1785,7 +1785,7 @@
                   <a:srgbClr val="556B82"/>
                 </a:solidFill>
               </a:rPr>
-              <a:t>ABAP Moderno · Módulo 04 — Programação ABAP Intermediária  ·  Aula 5 de 9 — Performance de tabelas</a:t>
+              <a:t>ABAP Moderno · Módulo 02 — Programação ABAP Intermediária  ·  Aula 5 de 9 — Performance de tabelas</a:t>
             </a:r>
             <a:endParaRPr lang="en-US" sz="900" dirty="0"/>
           </a:p>
@@ -2216,7 +2216,7 @@
                   <a:srgbClr val="89D1FF"/>
                 </a:solidFill>
               </a:rPr>
-              <a:t>MÓDULO 04 · AULA 05 DE 09</a:t>
+              <a:t>MÓDULO 02 · AULA 05 DE 09</a:t>
             </a:r>
             <a:endParaRPr lang="en-US" sz="1400" dirty="0"/>
           </a:p>
@@ -2602,7 +2602,7 @@
                   <a:srgbClr val="8FA3C7"/>
                 </a:solidFill>
               </a:rPr>
-              <a:t>ABAP Moderno · Módulo 04 — Programação ABAP Intermediária · Design System SAP Horizon</a:t>
+              <a:t>ABAP Moderno · Módulo 02 — Programação ABAP Intermediária · Design System SAP Horizon</a:t>
             </a:r>
             <a:endParaRPr lang="en-US" sz="1100" dirty="0"/>
           </a:p>
@@ -2791,7 +2791,7 @@
         <p:spPr>
           <a:xfrm>
             <a:off x="640080" y="1700784"/>
-            <a:ext cx="1997964" cy="292608"/>
+            <a:ext cx="2386584" cy="292608"/>
           </a:xfrm>
           <a:prstGeom prst="rect">
             <a:avLst/>
@@ -2811,7 +2811,7 @@
         <p:spPr>
           <a:xfrm>
             <a:off x="640080" y="1700784"/>
-            <a:ext cx="1997964" cy="27432"/>
+            <a:ext cx="2386584" cy="27432"/>
           </a:xfrm>
           <a:prstGeom prst="rect">
             <a:avLst/>
@@ -2831,7 +2831,7 @@
         <p:spPr>
           <a:xfrm>
             <a:off x="731520" y="1719072"/>
-            <a:ext cx="1815084" cy="274320"/>
+            <a:ext cx="2203704" cy="274320"/>
           </a:xfrm>
           <a:prstGeom prst="rect">
             <a:avLst/>
@@ -2852,7 +2852,7 @@
                   <a:srgbClr val="FFFFFF"/>
                 </a:solidFill>
               </a:rPr>
-              <a:t>zcl_05_keys.clas.abap</a:t>
+              <a:t>zcl_pc_itab_demo.clas.abap</a:t>
             </a:r>
             <a:endParaRPr lang="en-US" sz="950" dirty="0"/>
           </a:p>
@@ -2888,7 +2888,7 @@
                   <a:srgbClr val="9DA5B4"/>
                 </a:solidFill>
               </a:rPr>
-              <a:t>ZS4D401_## › ZCL_05_KEYS</a:t>
+              <a:t>Exemplo sobre ZTA_PC_ITEM_PED</a:t>
             </a:r>
             <a:endParaRPr lang="en-US" sz="850" dirty="0"/>
           </a:p>
@@ -3214,26 +3214,6 @@
             </a:r>
             <a:endParaRPr lang="en-US" sz="950" dirty="0"/>
           </a:p>
-          <a:p>
-            <a:pPr algn="r" indent="0" marL="0">
-              <a:lnSpc>
-                <a:spcPct val="105000"/>
-              </a:lnSpc>
-              <a:buNone/>
-            </a:pPr>
-            <a:r>
-              <a:rPr lang="en-US" sz="950" dirty="0">
-                <a:solidFill>
-                  <a:srgbClr val="6E7681"/>
-                </a:solidFill>
-                <a:latin typeface="Courier New" pitchFamily="34" charset="0"/>
-                <a:ea typeface="Courier New" pitchFamily="34" charset="-122"/>
-                <a:cs typeface="Courier New" pitchFamily="34" charset="-120"/>
-              </a:rPr>
-              <a:t>16</a:t>
-            </a:r>
-            <a:endParaRPr lang="en-US" sz="950" dirty="0"/>
-          </a:p>
         </p:txBody>
       </p:sp>
       <p:sp>
@@ -3294,7 +3274,7 @@
                 <a:ea typeface="Courier New" pitchFamily="34" charset="-122"/>
                 <a:cs typeface="Courier New" pitchFamily="34" charset="-120"/>
               </a:rPr>
-              <a:t>flights</a:t>
+              <a:t>itens</a:t>
             </a:r>
             <a:r>
               <a:rPr lang="en-US" sz="950" dirty="0">
@@ -3404,7 +3384,7 @@
                 <a:ea typeface="Courier New" pitchFamily="34" charset="-122"/>
                 <a:cs typeface="Courier New" pitchFamily="34" charset="-120"/>
               </a:rPr>
-              <a:t>zs4d401_flights</a:t>
+              <a:t>zta_pc_item_ped</a:t>
             </a:r>
             <a:endParaRPr lang="en-US" sz="950" dirty="0"/>
           </a:p>
@@ -3501,7 +3481,7 @@
                 <a:ea typeface="Courier New" pitchFamily="34" charset="-122"/>
                 <a:cs typeface="Courier New" pitchFamily="34" charset="-120"/>
               </a:rPr>
-              <a:t>carrier_id</a:t>
+              <a:t>pedido_uuid</a:t>
             </a:r>
             <a:r>
               <a:rPr lang="en-US" sz="950" dirty="0">
@@ -3523,29 +3503,7 @@
                 <a:ea typeface="Courier New" pitchFamily="34" charset="-122"/>
                 <a:cs typeface="Courier New" pitchFamily="34" charset="-120"/>
               </a:rPr>
-              <a:t>connection_id</a:t>
-            </a:r>
-            <a:r>
-              <a:rPr lang="en-US" sz="950" dirty="0">
-                <a:solidFill>
-                  <a:srgbClr val="CCCCCC"/>
-                </a:solidFill>
-                <a:latin typeface="Courier New" pitchFamily="34" charset="0"/>
-                <a:ea typeface="Courier New" pitchFamily="34" charset="-122"/>
-                <a:cs typeface="Courier New" pitchFamily="34" charset="-120"/>
-              </a:rPr>
-              <a:t> </a:t>
-            </a:r>
-            <a:r>
-              <a:rPr lang="en-US" sz="950" dirty="0">
-                <a:solidFill>
-                  <a:srgbClr val="CCCCCC"/>
-                </a:solidFill>
-                <a:latin typeface="Courier New" pitchFamily="34" charset="0"/>
-                <a:ea typeface="Courier New" pitchFamily="34" charset="-122"/>
-                <a:cs typeface="Courier New" pitchFamily="34" charset="-120"/>
-              </a:rPr>
-              <a:t>flight_date</a:t>
+              <a:t>item_uuid</a:t>
             </a:r>
             <a:endParaRPr lang="en-US" sz="950" dirty="0"/>
           </a:p>
@@ -3664,7 +3622,7 @@
                 <a:ea typeface="Courier New" pitchFamily="34" charset="-122"/>
                 <a:cs typeface="Courier New" pitchFamily="34" charset="-120"/>
               </a:rPr>
-              <a:t>by_plane</a:t>
+              <a:t>por_item</a:t>
             </a:r>
             <a:endParaRPr lang="en-US" sz="950" dirty="0"/>
           </a:p>
@@ -3717,7 +3675,7 @@
                 <a:ea typeface="Courier New" pitchFamily="34" charset="-122"/>
                 <a:cs typeface="Courier New" pitchFamily="34" charset="-120"/>
               </a:rPr>
-              <a:t>plane_type_id</a:t>
+              <a:t>item_uuid</a:t>
             </a:r>
             <a:endParaRPr lang="en-US" sz="950" dirty="0"/>
           </a:p>
@@ -3836,7 +3794,7 @@
                 <a:ea typeface="Courier New" pitchFamily="34" charset="-122"/>
                 <a:cs typeface="Courier New" pitchFamily="34" charset="-120"/>
               </a:rPr>
-              <a:t>by_id</a:t>
+              <a:t>por_id</a:t>
             </a:r>
             <a:endParaRPr lang="en-US" sz="950" dirty="0"/>
           </a:p>
@@ -3889,51 +3847,7 @@
                 <a:ea typeface="Courier New" pitchFamily="34" charset="-122"/>
                 <a:cs typeface="Courier New" pitchFamily="34" charset="-120"/>
               </a:rPr>
-              <a:t>carrier_id</a:t>
-            </a:r>
-            <a:r>
-              <a:rPr lang="en-US" sz="950" dirty="0">
-                <a:solidFill>
-                  <a:srgbClr val="CCCCCC"/>
-                </a:solidFill>
-                <a:latin typeface="Courier New" pitchFamily="34" charset="0"/>
-                <a:ea typeface="Courier New" pitchFamily="34" charset="-122"/>
-                <a:cs typeface="Courier New" pitchFamily="34" charset="-120"/>
-              </a:rPr>
-              <a:t> </a:t>
-            </a:r>
-            <a:r>
-              <a:rPr lang="en-US" sz="950" dirty="0">
-                <a:solidFill>
-                  <a:srgbClr val="CCCCCC"/>
-                </a:solidFill>
-                <a:latin typeface="Courier New" pitchFamily="34" charset="0"/>
-                <a:ea typeface="Courier New" pitchFamily="34" charset="-122"/>
-                <a:cs typeface="Courier New" pitchFamily="34" charset="-120"/>
-              </a:rPr>
-              <a:t>connection_id</a:t>
-            </a:r>
-            <a:r>
-              <a:rPr lang="en-US" sz="950" dirty="0">
-                <a:solidFill>
-                  <a:srgbClr val="CCCCCC"/>
-                </a:solidFill>
-                <a:latin typeface="Courier New" pitchFamily="34" charset="0"/>
-                <a:ea typeface="Courier New" pitchFamily="34" charset="-122"/>
-                <a:cs typeface="Courier New" pitchFamily="34" charset="-120"/>
-              </a:rPr>
-              <a:t> </a:t>
-            </a:r>
-            <a:r>
-              <a:rPr lang="en-US" sz="950" dirty="0">
-                <a:solidFill>
-                  <a:srgbClr val="CCCCCC"/>
-                </a:solidFill>
-                <a:latin typeface="Courier New" pitchFamily="34" charset="0"/>
-                <a:ea typeface="Courier New" pitchFamily="34" charset="-122"/>
-                <a:cs typeface="Courier New" pitchFamily="34" charset="-120"/>
-              </a:rPr>
-              <a:t>flight_date</a:t>
+              <a:t>item_pedido_uuid</a:t>
             </a:r>
             <a:r>
               <a:rPr lang="en-US" sz="950" dirty="0">
@@ -4048,7 +3962,7 @@
                 <a:ea typeface="Courier New" pitchFamily="34" charset="-122"/>
                 <a:cs typeface="Courier New" pitchFamily="34" charset="-120"/>
               </a:rPr>
-              <a:t>flights</a:t>
+              <a:t>itens</a:t>
             </a:r>
             <a:r>
               <a:rPr lang="en-US" sz="950" dirty="0">
@@ -4114,7 +4028,7 @@
                 <a:ea typeface="Courier New" pitchFamily="34" charset="-122"/>
                 <a:cs typeface="Courier New" pitchFamily="34" charset="-120"/>
               </a:rPr>
-              <a:t>flight</a:t>
+              <a:t>item</a:t>
             </a:r>
             <a:r>
               <a:rPr lang="en-US" sz="950" dirty="0">
@@ -4200,7 +4114,7 @@
                 <a:ea typeface="Courier New" pitchFamily="34" charset="-122"/>
                 <a:cs typeface="Courier New" pitchFamily="34" charset="-120"/>
               </a:rPr>
-              <a:t>by_plane</a:t>
+              <a:t>por_item</a:t>
             </a:r>
             <a:r>
               <a:rPr lang="en-US" sz="950" dirty="0">
@@ -4244,7 +4158,7 @@
                 <a:ea typeface="Courier New" pitchFamily="34" charset="-122"/>
                 <a:cs typeface="Courier New" pitchFamily="34" charset="-120"/>
               </a:rPr>
-              <a:t>plane_type_id</a:t>
+              <a:t>item_uuid</a:t>
             </a:r>
             <a:r>
               <a:rPr lang="en-US" sz="950" dirty="0">
@@ -4282,13 +4196,13 @@
             <a:r>
               <a:rPr lang="en-US" sz="950" dirty="0">
                 <a:solidFill>
-                  <a:srgbClr val="CE9178"/>
-                </a:solidFill>
-                <a:latin typeface="Courier New" pitchFamily="34" charset="0"/>
-                <a:ea typeface="Courier New" pitchFamily="34" charset="-122"/>
-                <a:cs typeface="Courier New" pitchFamily="34" charset="-120"/>
-              </a:rPr>
-              <a:t>'A350'</a:t>
+                  <a:srgbClr val="CCCCCC"/>
+                </a:solidFill>
+                <a:latin typeface="Courier New" pitchFamily="34" charset="0"/>
+                <a:ea typeface="Courier New" pitchFamily="34" charset="-122"/>
+                <a:cs typeface="Courier New" pitchFamily="34" charset="-120"/>
+              </a:rPr>
+              <a:t>lv_item</a:t>
             </a:r>
             <a:r>
               <a:rPr lang="en-US" sz="950" dirty="0">
@@ -4330,7 +4244,7 @@
                 <a:ea typeface="Courier New" pitchFamily="34" charset="-122"/>
                 <a:cs typeface="Courier New" pitchFamily="34" charset="-120"/>
               </a:rPr>
-              <a:t>" …</a:t>
+              <a:t>" … quanto deste item está reservado em pedidos</a:t>
             </a:r>
             <a:endParaRPr lang="en-US" sz="950" dirty="0"/>
           </a:p>
@@ -4423,7 +4337,7 @@
                 <a:ea typeface="Courier New" pitchFamily="34" charset="-122"/>
                 <a:cs typeface="Courier New" pitchFamily="34" charset="-120"/>
               </a:rPr>
-              <a:t>one</a:t>
+              <a:t>um</a:t>
             </a:r>
             <a:r>
               <a:rPr lang="en-US" sz="950" dirty="0">
@@ -4478,7 +4392,7 @@
                 <a:ea typeface="Courier New" pitchFamily="34" charset="-122"/>
                 <a:cs typeface="Courier New" pitchFamily="34" charset="-120"/>
               </a:rPr>
-              <a:t>flights</a:t>
+              <a:t>itens</a:t>
             </a:r>
             <a:r>
               <a:rPr lang="en-US" sz="950" dirty="0">
@@ -4533,73 +4447,7 @@
                 <a:ea typeface="Courier New" pitchFamily="34" charset="-122"/>
                 <a:cs typeface="Courier New" pitchFamily="34" charset="-120"/>
               </a:rPr>
-              <a:t>by_id</a:t>
-            </a:r>
-            <a:r>
-              <a:rPr lang="en-US" sz="950" dirty="0">
-                <a:solidFill>
-                  <a:srgbClr val="CCCCCC"/>
-                </a:solidFill>
-                <a:latin typeface="Courier New" pitchFamily="34" charset="0"/>
-                <a:ea typeface="Courier New" pitchFamily="34" charset="-122"/>
-                <a:cs typeface="Courier New" pitchFamily="34" charset="-120"/>
-              </a:rPr>
-              <a:t> </a:t>
-            </a:r>
-            <a:r>
-              <a:rPr lang="en-US" sz="950" dirty="0">
-                <a:solidFill>
-                  <a:srgbClr val="CCCCCC"/>
-                </a:solidFill>
-                <a:latin typeface="Courier New" pitchFamily="34" charset="0"/>
-                <a:ea typeface="Courier New" pitchFamily="34" charset="-122"/>
-                <a:cs typeface="Courier New" pitchFamily="34" charset="-120"/>
-              </a:rPr>
-              <a:t>carrier_id</a:t>
-            </a:r>
-            <a:r>
-              <a:rPr lang="en-US" sz="950" dirty="0">
-                <a:solidFill>
-                  <a:srgbClr val="CCCCCC"/>
-                </a:solidFill>
-                <a:latin typeface="Courier New" pitchFamily="34" charset="0"/>
-                <a:ea typeface="Courier New" pitchFamily="34" charset="-122"/>
-                <a:cs typeface="Courier New" pitchFamily="34" charset="-120"/>
-              </a:rPr>
-              <a:t> </a:t>
-            </a:r>
-            <a:r>
-              <a:rPr lang="en-US" sz="950" dirty="0">
-                <a:solidFill>
-                  <a:srgbClr val="CCCCCC"/>
-                </a:solidFill>
-                <a:latin typeface="Courier New" pitchFamily="34" charset="0"/>
-                <a:ea typeface="Courier New" pitchFamily="34" charset="-122"/>
-                <a:cs typeface="Courier New" pitchFamily="34" charset="-120"/>
-              </a:rPr>
-              <a:t>=</a:t>
-            </a:r>
-            <a:r>
-              <a:rPr lang="en-US" sz="950" dirty="0">
-                <a:solidFill>
-                  <a:srgbClr val="CCCCCC"/>
-                </a:solidFill>
-                <a:latin typeface="Courier New" pitchFamily="34" charset="0"/>
-                <a:ea typeface="Courier New" pitchFamily="34" charset="-122"/>
-                <a:cs typeface="Courier New" pitchFamily="34" charset="-120"/>
-              </a:rPr>
-              <a:t> </a:t>
-            </a:r>
-            <a:r>
-              <a:rPr lang="en-US" sz="950" dirty="0">
-                <a:solidFill>
-                  <a:srgbClr val="CE9178"/>
-                </a:solidFill>
-                <a:latin typeface="Courier New" pitchFamily="34" charset="0"/>
-                <a:ea typeface="Courier New" pitchFamily="34" charset="-122"/>
-                <a:cs typeface="Courier New" pitchFamily="34" charset="-120"/>
-              </a:rPr>
-              <a:t>'LH'</a:t>
+              <a:t>por_id</a:t>
             </a:r>
             <a:endParaRPr lang="en-US" sz="950" dirty="0"/>
           </a:p>
@@ -4619,7 +4467,7 @@
                 <a:ea typeface="Courier New" pitchFamily="34" charset="-122"/>
                 <a:cs typeface="Courier New" pitchFamily="34" charset="-120"/>
               </a:rPr>
-              <a:t>                    </a:t>
+              <a:t>                  </a:t>
             </a:r>
             <a:r>
               <a:rPr lang="en-US" sz="950" dirty="0">
@@ -4630,7 +4478,7 @@
                 <a:ea typeface="Courier New" pitchFamily="34" charset="-122"/>
                 <a:cs typeface="Courier New" pitchFamily="34" charset="-120"/>
               </a:rPr>
-              <a:t>connection_id</a:t>
+              <a:t>item_pedido_uuid</a:t>
             </a:r>
             <a:r>
               <a:rPr lang="en-US" sz="950" dirty="0">
@@ -4668,88 +4516,13 @@
             <a:r>
               <a:rPr lang="en-US" sz="950" dirty="0">
                 <a:solidFill>
-                  <a:srgbClr val="CE9178"/>
-                </a:solidFill>
-                <a:latin typeface="Courier New" pitchFamily="34" charset="0"/>
-                <a:ea typeface="Courier New" pitchFamily="34" charset="-122"/>
-                <a:cs typeface="Courier New" pitchFamily="34" charset="-120"/>
-              </a:rPr>
-              <a:t>'0405'</a:t>
-            </a:r>
-            <a:endParaRPr lang="en-US" sz="950" dirty="0"/>
-          </a:p>
-          <a:p>
-            <a:pPr indent="0" marL="0">
-              <a:lnSpc>
-                <a:spcPct val="105000"/>
-              </a:lnSpc>
-              <a:buNone/>
-            </a:pPr>
-            <a:r>
-              <a:rPr lang="en-US" sz="950" dirty="0">
-                <a:solidFill>
-                  <a:srgbClr val="CCCCCC"/>
-                </a:solidFill>
-                <a:latin typeface="Courier New" pitchFamily="34" charset="0"/>
-                <a:ea typeface="Courier New" pitchFamily="34" charset="-122"/>
-                <a:cs typeface="Courier New" pitchFamily="34" charset="-120"/>
-              </a:rPr>
-              <a:t>                    </a:t>
-            </a:r>
-            <a:r>
-              <a:rPr lang="en-US" sz="950" dirty="0">
-                <a:solidFill>
-                  <a:srgbClr val="CCCCCC"/>
-                </a:solidFill>
-                <a:latin typeface="Courier New" pitchFamily="34" charset="0"/>
-                <a:ea typeface="Courier New" pitchFamily="34" charset="-122"/>
-                <a:cs typeface="Courier New" pitchFamily="34" charset="-120"/>
-              </a:rPr>
-              <a:t>flight_date</a:t>
-            </a:r>
-            <a:r>
-              <a:rPr lang="en-US" sz="950" dirty="0">
-                <a:solidFill>
-                  <a:srgbClr val="CCCCCC"/>
-                </a:solidFill>
-                <a:latin typeface="Courier New" pitchFamily="34" charset="0"/>
-                <a:ea typeface="Courier New" pitchFamily="34" charset="-122"/>
-                <a:cs typeface="Courier New" pitchFamily="34" charset="-120"/>
-              </a:rPr>
-              <a:t> </a:t>
-            </a:r>
-            <a:r>
-              <a:rPr lang="en-US" sz="950" dirty="0">
-                <a:solidFill>
-                  <a:srgbClr val="CCCCCC"/>
-                </a:solidFill>
-                <a:latin typeface="Courier New" pitchFamily="34" charset="0"/>
-                <a:ea typeface="Courier New" pitchFamily="34" charset="-122"/>
-                <a:cs typeface="Courier New" pitchFamily="34" charset="-120"/>
-              </a:rPr>
-              <a:t>=</a:t>
-            </a:r>
-            <a:r>
-              <a:rPr lang="en-US" sz="950" dirty="0">
-                <a:solidFill>
-                  <a:srgbClr val="CCCCCC"/>
-                </a:solidFill>
-                <a:latin typeface="Courier New" pitchFamily="34" charset="0"/>
-                <a:ea typeface="Courier New" pitchFamily="34" charset="-122"/>
-                <a:cs typeface="Courier New" pitchFamily="34" charset="-120"/>
-              </a:rPr>
-              <a:t> </a:t>
-            </a:r>
-            <a:r>
-              <a:rPr lang="en-US" sz="950" dirty="0">
-                <a:solidFill>
-                  <a:srgbClr val="CE9178"/>
-                </a:solidFill>
-                <a:latin typeface="Courier New" pitchFamily="34" charset="0"/>
-                <a:ea typeface="Courier New" pitchFamily="34" charset="-122"/>
-                <a:cs typeface="Courier New" pitchFamily="34" charset="-120"/>
-              </a:rPr>
-              <a:t>'20250101'</a:t>
+                  <a:srgbClr val="CCCCCC"/>
+                </a:solidFill>
+                <a:latin typeface="Courier New" pitchFamily="34" charset="0"/>
+                <a:ea typeface="Courier New" pitchFamily="34" charset="-122"/>
+                <a:cs typeface="Courier New" pitchFamily="34" charset="-120"/>
+              </a:rPr>
+              <a:t>lv_item_pedido</a:t>
             </a:r>
             <a:r>
               <a:rPr lang="en-US" sz="950" dirty="0">
@@ -5282,7 +5055,7 @@
                 <a:ea typeface="Courier New" pitchFamily="34" charset="-122"/>
                 <a:cs typeface="Courier New" pitchFamily="34" charset="-120"/>
               </a:rPr>
-              <a:t>plane_type_id</a:t>
+              <a:t>item_uuid</a:t>
             </a:r>
             <a:r>
               <a:rPr lang="en-US" sz="1050" dirty="0">
@@ -5967,7 +5740,7 @@
         </p:blipFill>
         <p:spPr>
           <a:xfrm>
-            <a:off x="6562192" y="2577751"/>
+            <a:off x="877824" y="2577751"/>
             <a:ext cx="256032" cy="256032"/>
           </a:xfrm>
           <a:prstGeom prst="rect">
@@ -5991,8 +5764,8 @@
         </p:blipFill>
         <p:spPr>
           <a:xfrm>
-            <a:off x="877824" y="2577751"/>
-            <a:ext cx="256032" cy="256032"/>
+            <a:off x="749808" y="5176361"/>
+            <a:ext cx="310896" cy="310896"/>
           </a:xfrm>
           <a:prstGeom prst="rect">
             <a:avLst/>
@@ -6015,8 +5788,8 @@
         </p:blipFill>
         <p:spPr>
           <a:xfrm>
-            <a:off x="749808" y="5176361"/>
-            <a:ext cx="310896" cy="310896"/>
+            <a:off x="6562192" y="2577751"/>
+            <a:ext cx="256032" cy="256032"/>
           </a:xfrm>
           <a:prstGeom prst="rect">
             <a:avLst/>
@@ -6159,7 +5932,7 @@
                   <a:srgbClr val="FFFFFF"/>
                 </a:solidFill>
               </a:rPr>
-              <a:t>O que aprendemos na aula 04.05</a:t>
+              <a:t>O que aprendemos na aula 02.05</a:t>
             </a:r>
             <a:endParaRPr lang="en-US" sz="3200" dirty="0"/>
           </a:p>
@@ -6703,7 +6476,7 @@
                   <a:srgbClr val="89D1FF"/>
                 </a:solidFill>
               </a:rPr>
-              <a:t>Próxima aula · 04.06  </a:t>
+              <a:t>Próxima aula · 02.06  </a:t>
             </a:r>
             <a:r>
               <a:rPr lang="en-US" sz="1500" dirty="0">
@@ -6757,7 +6530,7 @@
         </p:blipFill>
         <p:spPr>
           <a:xfrm>
-            <a:off x="6355080" y="2926080"/>
+            <a:off x="6355080" y="1965960"/>
             <a:ext cx="256032" cy="256032"/>
           </a:xfrm>
           <a:prstGeom prst="rect">
@@ -6781,7 +6554,7 @@
         </p:blipFill>
         <p:spPr>
           <a:xfrm>
-            <a:off x="822960" y="2926080"/>
+            <a:off x="6355080" y="2926080"/>
             <a:ext cx="256032" cy="256032"/>
           </a:xfrm>
           <a:prstGeom prst="rect">
@@ -6805,7 +6578,7 @@
         </p:blipFill>
         <p:spPr>
           <a:xfrm>
-            <a:off x="6355080" y="1965960"/>
+            <a:off x="822960" y="2926080"/>
             <a:ext cx="256032" cy="256032"/>
           </a:xfrm>
           <a:prstGeom prst="rect">
@@ -6980,7 +6753,7 @@
                   <a:srgbClr val="1D2D3E"/>
                 </a:solidFill>
               </a:rPr>
-              <a:t>Módulo 04 em 9 aulas: ABAP intermediário</a:t>
+              <a:t>Módulo 02 em 9 aulas: ABAP intermediário</a:t>
             </a:r>
             <a:endParaRPr lang="en-US" sz="2800" dirty="0"/>
           </a:p>
@@ -8562,7 +8335,7 @@
                   <a:srgbClr val="1D2D3E"/>
                 </a:solidFill>
               </a:rPr>
-              <a:t>aceleramos o processamento de uma tabela com milhares de voos: menos cópias, buscas pela chave e índices secundários.</a:t>
+              <a:t>aceleramos o processamento de uma tabela com milhares de itens de pedido: menos cópias, buscas pela chave e índices secundários.</a:t>
             </a:r>
             <a:endParaRPr lang="en-US" sz="1400" dirty="0"/>
           </a:p>
@@ -8584,7 +8357,7 @@
         </p:blipFill>
         <p:spPr>
           <a:xfrm>
-            <a:off x="4328038" y="1847088"/>
+            <a:off x="6583497" y="1847088"/>
             <a:ext cx="347472" cy="347472"/>
           </a:xfrm>
           <a:prstGeom prst="rect">
@@ -8632,7 +8405,7 @@
         </p:blipFill>
         <p:spPr>
           <a:xfrm>
-            <a:off x="6583497" y="1847088"/>
+            <a:off x="4328038" y="1847088"/>
             <a:ext cx="347472" cy="347472"/>
           </a:xfrm>
           <a:prstGeom prst="rect">
@@ -8680,7 +8453,7 @@
         </p:blipFill>
         <p:spPr>
           <a:xfrm>
-            <a:off x="11094415" y="1847088"/>
+            <a:off x="2072579" y="3858768"/>
             <a:ext cx="347472" cy="347472"/>
           </a:xfrm>
           <a:prstGeom prst="rect">
@@ -8704,7 +8477,7 @@
         </p:blipFill>
         <p:spPr>
           <a:xfrm>
-            <a:off x="2072579" y="3858768"/>
+            <a:off x="11094415" y="1847088"/>
             <a:ext cx="347472" cy="347472"/>
           </a:xfrm>
           <a:prstGeom prst="rect">
@@ -8752,7 +8525,7 @@
         </p:blipFill>
         <p:spPr>
           <a:xfrm>
-            <a:off x="8838956" y="3858768"/>
+            <a:off x="6583497" y="3858768"/>
             <a:ext cx="347472" cy="347472"/>
           </a:xfrm>
           <a:prstGeom prst="rect">
@@ -8776,8 +8549,8 @@
         </p:blipFill>
         <p:spPr>
           <a:xfrm>
-            <a:off x="6583497" y="3858768"/>
-            <a:ext cx="347472" cy="347472"/>
+            <a:off x="749808" y="5751576"/>
+            <a:ext cx="310896" cy="310896"/>
           </a:xfrm>
           <a:prstGeom prst="rect">
             <a:avLst/>
@@ -8800,8 +8573,8 @@
         </p:blipFill>
         <p:spPr>
           <a:xfrm>
-            <a:off x="749808" y="5751576"/>
-            <a:ext cx="310896" cy="310896"/>
+            <a:off x="8838956" y="3858768"/>
+            <a:ext cx="347472" cy="347472"/>
           </a:xfrm>
           <a:prstGeom prst="rect">
             <a:avLst/>
@@ -9616,7 +9389,7 @@
                   <a:srgbClr val="556B82"/>
                 </a:solidFill>
               </a:rPr>
-              <a:t> para buscas por outras colunas. Meça sempre com o ABAP Profiler (aula 04.01).</a:t>
+              <a:t> para buscas por outras colunas. Meça sempre com o ABAP Profiler (aula 02.01).</a:t>
             </a:r>
             <a:endParaRPr lang="en-US" sz="1400" dirty="0"/>
           </a:p>
@@ -10116,7 +9889,7 @@
                   <a:srgbClr val="89D1FF"/>
                 </a:solidFill>
               </a:rPr>
-              <a:t>AULA 04.05 · SEÇÃO 1</a:t>
+              <a:t>AULA 02.05 · SEÇÃO 1</a:t>
             </a:r>
             <a:endParaRPr lang="en-US" sz="1300" dirty="0"/>
           </a:p>
@@ -10639,7 +10412,7 @@
         <p:spPr>
           <a:xfrm>
             <a:off x="640080" y="1700784"/>
-            <a:ext cx="1997964" cy="292608"/>
+            <a:ext cx="2386584" cy="292608"/>
           </a:xfrm>
           <a:prstGeom prst="rect">
             <a:avLst/>
@@ -10659,7 +10432,7 @@
         <p:spPr>
           <a:xfrm>
             <a:off x="640080" y="1700784"/>
-            <a:ext cx="1997964" cy="27432"/>
+            <a:ext cx="2386584" cy="27432"/>
           </a:xfrm>
           <a:prstGeom prst="rect">
             <a:avLst/>
@@ -10679,7 +10452,7 @@
         <p:spPr>
           <a:xfrm>
             <a:off x="731520" y="1719072"/>
-            <a:ext cx="1815084" cy="274320"/>
+            <a:ext cx="2203704" cy="274320"/>
           </a:xfrm>
           <a:prstGeom prst="rect">
             <a:avLst/>
@@ -10700,7 +10473,7 @@
                   <a:srgbClr val="FFFFFF"/>
                 </a:solidFill>
               </a:rPr>
-              <a:t>zcl_05_itab.clas.abap</a:t>
+              <a:t>zcl_pc_itab_demo.clas.abap</a:t>
             </a:r>
             <a:endParaRPr lang="en-US" sz="950" dirty="0"/>
           </a:p>
@@ -10736,7 +10509,7 @@
                   <a:srgbClr val="9DA5B4"/>
                 </a:solidFill>
               </a:rPr>
-              <a:t>ZS4D401_## › ZCL_05_ITAB › main</a:t>
+              <a:t>Exemplo sobre ZTA_PC_ITEM_PED › main</a:t>
             </a:r>
             <a:endParaRPr lang="en-US" sz="850" dirty="0"/>
           </a:p>
@@ -11022,7 +10795,7 @@
                 <a:ea typeface="Courier New" pitchFamily="34" charset="-122"/>
                 <a:cs typeface="Courier New" pitchFamily="34" charset="-120"/>
               </a:rPr>
-              <a:t>flights</a:t>
+              <a:t>itens</a:t>
             </a:r>
             <a:r>
               <a:rPr lang="en-US" sz="1050" dirty="0">
@@ -11044,7 +10817,7 @@
                 <a:ea typeface="Courier New" pitchFamily="34" charset="-122"/>
                 <a:cs typeface="Courier New" pitchFamily="34" charset="-120"/>
               </a:rPr>
-              <a:t>                                </a:t>
+              <a:t>                                  </a:t>
             </a:r>
             <a:r>
               <a:rPr lang="en-US" sz="1050" i="1" dirty="0">
@@ -11097,7 +10870,7 @@
                 <a:ea typeface="Courier New" pitchFamily="34" charset="-122"/>
                 <a:cs typeface="Courier New" pitchFamily="34" charset="-120"/>
               </a:rPr>
-              <a:t>flights</a:t>
+              <a:t>itens</a:t>
             </a:r>
             <a:r>
               <a:rPr lang="en-US" sz="1050" dirty="0">
@@ -11141,7 +10914,7 @@
                 <a:ea typeface="Courier New" pitchFamily="34" charset="-122"/>
                 <a:cs typeface="Courier New" pitchFamily="34" charset="-120"/>
               </a:rPr>
-              <a:t>price</a:t>
+              <a:t>valor_total</a:t>
             </a:r>
             <a:r>
               <a:rPr lang="en-US" sz="1050" dirty="0">
@@ -11185,7 +10958,7 @@
                 <a:ea typeface="Courier New" pitchFamily="34" charset="-122"/>
                 <a:cs typeface="Courier New" pitchFamily="34" charset="-120"/>
               </a:rPr>
-              <a:t>flight_date</a:t>
+              <a:t>item_uuid</a:t>
             </a:r>
             <a:r>
               <a:rPr lang="en-US" sz="1050" dirty="0">
@@ -11278,7 +11051,7 @@
                 <a:ea typeface="Courier New" pitchFamily="34" charset="-122"/>
                 <a:cs typeface="Courier New" pitchFamily="34" charset="-120"/>
               </a:rPr>
-              <a:t>flights</a:t>
+              <a:t>itens</a:t>
             </a:r>
             <a:r>
               <a:rPr lang="en-US" sz="1050" dirty="0">
@@ -11322,7 +11095,7 @@
                 <a:ea typeface="Courier New" pitchFamily="34" charset="-122"/>
                 <a:cs typeface="Courier New" pitchFamily="34" charset="-120"/>
               </a:rPr>
-              <a:t>carrier_id</a:t>
+              <a:t>pedido_uuid</a:t>
             </a:r>
             <a:r>
               <a:rPr lang="en-US" sz="1050" dirty="0">
@@ -11344,7 +11117,7 @@
                 <a:ea typeface="Courier New" pitchFamily="34" charset="-122"/>
                 <a:cs typeface="Courier New" pitchFamily="34" charset="-120"/>
               </a:rPr>
-              <a:t>connection_id</a:t>
+              <a:t>item_uuid</a:t>
             </a:r>
             <a:r>
               <a:rPr lang="en-US" sz="1050" dirty="0">
@@ -11463,7 +11236,7 @@
                 <a:ea typeface="Courier New" pitchFamily="34" charset="-122"/>
                 <a:cs typeface="Courier New" pitchFamily="34" charset="-120"/>
               </a:rPr>
-              <a:t>flights</a:t>
+              <a:t>itens</a:t>
             </a:r>
             <a:endParaRPr lang="en-US" sz="1050" dirty="0"/>
           </a:p>
@@ -11516,7 +11289,7 @@
                 <a:ea typeface="Courier New" pitchFamily="34" charset="-122"/>
                 <a:cs typeface="Courier New" pitchFamily="34" charset="-120"/>
               </a:rPr>
-              <a:t>carrier_id</a:t>
+              <a:t>pedido_uuid</a:t>
             </a:r>
             <a:r>
               <a:rPr lang="en-US" sz="1050" dirty="0">
@@ -11538,7 +11311,7 @@
                 <a:ea typeface="Courier New" pitchFamily="34" charset="-122"/>
                 <a:cs typeface="Courier New" pitchFamily="34" charset="-120"/>
               </a:rPr>
-              <a:t>connection_id</a:t>
+              <a:t>item_uuid</a:t>
             </a:r>
             <a:r>
               <a:rPr lang="en-US" sz="1050" dirty="0">
@@ -12265,7 +12038,7 @@
                   <a:srgbClr val="1D2D3E"/>
                 </a:solidFill>
               </a:rPr>
-              <a:t> resolvem antes de chegar ao ABAP (aula 04.04).</a:t>
+              <a:t> resolvem antes de chegar ao ABAP (aula 02.04).</a:t>
             </a:r>
             <a:endParaRPr lang="en-US" sz="1400" dirty="0"/>
           </a:p>
@@ -12499,7 +12272,7 @@
         <p:spPr>
           <a:xfrm>
             <a:off x="640080" y="1700784"/>
-            <a:ext cx="1997964" cy="292608"/>
+            <a:ext cx="3163824" cy="292608"/>
           </a:xfrm>
           <a:prstGeom prst="rect">
             <a:avLst/>
@@ -12519,7 +12292,7 @@
         <p:spPr>
           <a:xfrm>
             <a:off x="640080" y="1700784"/>
-            <a:ext cx="1997964" cy="27432"/>
+            <a:ext cx="3163824" cy="27432"/>
           </a:xfrm>
           <a:prstGeom prst="rect">
             <a:avLst/>
@@ -12539,7 +12312,7 @@
         <p:spPr>
           <a:xfrm>
             <a:off x="731520" y="1719072"/>
-            <a:ext cx="1815084" cy="274320"/>
+            <a:ext cx="2980944" cy="274320"/>
           </a:xfrm>
           <a:prstGeom prst="rect">
             <a:avLst/>
@@ -12560,7 +12333,7 @@
                   <a:srgbClr val="FFFFFF"/>
                 </a:solidFill>
               </a:rPr>
-              <a:t>zcl_05_itab.clas.abap</a:t>
+              <a:t>zbp_r_pc_pedido.clas.locals_imp.abap</a:t>
             </a:r>
             <a:endParaRPr lang="en-US" sz="950" dirty="0"/>
           </a:p>
@@ -12596,7 +12369,7 @@
                   <a:srgbClr val="9DA5B4"/>
                 </a:solidFill>
               </a:rPr>
-              <a:t>ZS4D401_## › ZCL_05_ITAB › main</a:t>
+              <a:t>BO Pedido (CalcularTotalPedido) e exemplo</a:t>
             </a:r>
             <a:endParaRPr lang="en-US" sz="850" dirty="0"/>
           </a:p>
@@ -12982,7 +12755,7 @@
                 <a:ea typeface="Courier New" pitchFamily="34" charset="-122"/>
                 <a:cs typeface="Courier New" pitchFamily="34" charset="-120"/>
               </a:rPr>
-              <a:t>routes</a:t>
+              <a:t>pedidos</a:t>
             </a:r>
             <a:r>
               <a:rPr lang="en-US" sz="1050" dirty="0">
@@ -13059,7 +12832,7 @@
                 <a:ea typeface="Courier New" pitchFamily="34" charset="-122"/>
                 <a:cs typeface="Courier New" pitchFamily="34" charset="-120"/>
               </a:rPr>
-              <a:t>tt_routes</a:t>
+              <a:t>tt_pedidos</a:t>
             </a:r>
             <a:r>
               <a:rPr lang="en-US" sz="1050" dirty="0">
@@ -13123,7 +12896,7 @@
                 <a:ea typeface="Courier New" pitchFamily="34" charset="-122"/>
                 <a:cs typeface="Courier New" pitchFamily="34" charset="-120"/>
               </a:rPr>
-              <a:t>line</a:t>
+              <a:t>k</a:t>
             </a:r>
             <a:r>
               <a:rPr lang="en-US" sz="1050" dirty="0">
@@ -13167,139 +12940,7 @@
                 <a:ea typeface="Courier New" pitchFamily="34" charset="-122"/>
                 <a:cs typeface="Courier New" pitchFamily="34" charset="-120"/>
               </a:rPr>
-              <a:t>connections</a:t>
-            </a:r>
-            <a:r>
-              <a:rPr lang="en-US" sz="1050" dirty="0">
-                <a:solidFill>
-                  <a:srgbClr val="CCCCCC"/>
-                </a:solidFill>
-                <a:latin typeface="Courier New" pitchFamily="34" charset="0"/>
-                <a:ea typeface="Courier New" pitchFamily="34" charset="-122"/>
-                <a:cs typeface="Courier New" pitchFamily="34" charset="-120"/>
-              </a:rPr>
-              <a:t> </a:t>
-            </a:r>
-            <a:r>
-              <a:rPr lang="en-US" sz="1050" dirty="0">
-                <a:solidFill>
-                  <a:srgbClr val="569CD6"/>
-                </a:solidFill>
-                <a:latin typeface="Courier New" pitchFamily="34" charset="0"/>
-                <a:ea typeface="Courier New" pitchFamily="34" charset="-122"/>
-                <a:cs typeface="Courier New" pitchFamily="34" charset="-120"/>
-              </a:rPr>
-              <a:t>WHERE</a:t>
-            </a:r>
-            <a:r>
-              <a:rPr lang="en-US" sz="1050" dirty="0">
-                <a:solidFill>
-                  <a:srgbClr val="CCCCCC"/>
-                </a:solidFill>
-                <a:latin typeface="Courier New" pitchFamily="34" charset="0"/>
-                <a:ea typeface="Courier New" pitchFamily="34" charset="-122"/>
-                <a:cs typeface="Courier New" pitchFamily="34" charset="-120"/>
-              </a:rPr>
-              <a:t> </a:t>
-            </a:r>
-            <a:r>
-              <a:rPr lang="en-US" sz="1050" dirty="0">
-                <a:solidFill>
-                  <a:srgbClr val="CCCCCC"/>
-                </a:solidFill>
-                <a:latin typeface="Courier New" pitchFamily="34" charset="0"/>
-                <a:ea typeface="Courier New" pitchFamily="34" charset="-122"/>
-                <a:cs typeface="Courier New" pitchFamily="34" charset="-120"/>
-              </a:rPr>
-              <a:t>(</a:t>
-            </a:r>
-            <a:r>
-              <a:rPr lang="en-US" sz="1050" dirty="0">
-                <a:solidFill>
-                  <a:srgbClr val="CCCCCC"/>
-                </a:solidFill>
-                <a:latin typeface="Courier New" pitchFamily="34" charset="0"/>
-                <a:ea typeface="Courier New" pitchFamily="34" charset="-122"/>
-                <a:cs typeface="Courier New" pitchFamily="34" charset="-120"/>
-              </a:rPr>
-              <a:t> </a:t>
-            </a:r>
-            <a:r>
-              <a:rPr lang="en-US" sz="1050" dirty="0">
-                <a:solidFill>
-                  <a:srgbClr val="CCCCCC"/>
-                </a:solidFill>
-                <a:latin typeface="Courier New" pitchFamily="34" charset="0"/>
-                <a:ea typeface="Courier New" pitchFamily="34" charset="-122"/>
-                <a:cs typeface="Courier New" pitchFamily="34" charset="-120"/>
-              </a:rPr>
-              <a:t>carrier_id</a:t>
-            </a:r>
-            <a:r>
-              <a:rPr lang="en-US" sz="1050" dirty="0">
-                <a:solidFill>
-                  <a:srgbClr val="CCCCCC"/>
-                </a:solidFill>
-                <a:latin typeface="Courier New" pitchFamily="34" charset="0"/>
-                <a:ea typeface="Courier New" pitchFamily="34" charset="-122"/>
-                <a:cs typeface="Courier New" pitchFamily="34" charset="-120"/>
-              </a:rPr>
-              <a:t> </a:t>
-            </a:r>
-            <a:r>
-              <a:rPr lang="en-US" sz="1050" dirty="0">
-                <a:solidFill>
-                  <a:srgbClr val="CCCCCC"/>
-                </a:solidFill>
-                <a:latin typeface="Courier New" pitchFamily="34" charset="0"/>
-                <a:ea typeface="Courier New" pitchFamily="34" charset="-122"/>
-                <a:cs typeface="Courier New" pitchFamily="34" charset="-120"/>
-              </a:rPr>
-              <a:t>=</a:t>
-            </a:r>
-            <a:r>
-              <a:rPr lang="en-US" sz="1050" dirty="0">
-                <a:solidFill>
-                  <a:srgbClr val="CCCCCC"/>
-                </a:solidFill>
-                <a:latin typeface="Courier New" pitchFamily="34" charset="0"/>
-                <a:ea typeface="Courier New" pitchFamily="34" charset="-122"/>
-                <a:cs typeface="Courier New" pitchFamily="34" charset="-120"/>
-              </a:rPr>
-              <a:t> </a:t>
-            </a:r>
-            <a:r>
-              <a:rPr lang="en-US" sz="1050" dirty="0">
-                <a:solidFill>
-                  <a:srgbClr val="CE9178"/>
-                </a:solidFill>
-                <a:latin typeface="Courier New" pitchFamily="34" charset="0"/>
-                <a:ea typeface="Courier New" pitchFamily="34" charset="-122"/>
-                <a:cs typeface="Courier New" pitchFamily="34" charset="-120"/>
-              </a:rPr>
-              <a:t>'LH'</a:t>
-            </a:r>
-            <a:r>
-              <a:rPr lang="en-US" sz="1050" dirty="0">
-                <a:solidFill>
-                  <a:srgbClr val="CCCCCC"/>
-                </a:solidFill>
-                <a:latin typeface="Courier New" pitchFamily="34" charset="0"/>
-                <a:ea typeface="Courier New" pitchFamily="34" charset="-122"/>
-                <a:cs typeface="Courier New" pitchFamily="34" charset="-120"/>
-              </a:rPr>
-              <a:t> </a:t>
-            </a:r>
-            <a:r>
-              <a:rPr lang="en-US" sz="1050" dirty="0">
-                <a:solidFill>
-                  <a:srgbClr val="CCCCCC"/>
-                </a:solidFill>
-                <a:latin typeface="Courier New" pitchFamily="34" charset="0"/>
-                <a:ea typeface="Courier New" pitchFamily="34" charset="-122"/>
-                <a:cs typeface="Courier New" pitchFamily="34" charset="-120"/>
-              </a:rPr>
-              <a:t>)</a:t>
+              <a:t>keys</a:t>
             </a:r>
             <a:endParaRPr lang="en-US" sz="1050" dirty="0"/>
           </a:p>
@@ -13352,7 +12993,29 @@
                 <a:ea typeface="Courier New" pitchFamily="34" charset="-122"/>
                 <a:cs typeface="Courier New" pitchFamily="34" charset="-120"/>
               </a:rPr>
-              <a:t>carrier_id</a:t>
+              <a:t>is_draft</a:t>
+            </a:r>
+            <a:r>
+              <a:rPr lang="en-US" sz="1050" dirty="0">
+                <a:solidFill>
+                  <a:srgbClr val="CCCCCC"/>
+                </a:solidFill>
+                <a:latin typeface="Courier New" pitchFamily="34" charset="0"/>
+                <a:ea typeface="Courier New" pitchFamily="34" charset="-122"/>
+                <a:cs typeface="Courier New" pitchFamily="34" charset="-120"/>
+              </a:rPr>
+              <a:t>    </a:t>
+            </a:r>
+            <a:r>
+              <a:rPr lang="en-US" sz="1050" dirty="0">
+                <a:solidFill>
+                  <a:srgbClr val="CCCCCC"/>
+                </a:solidFill>
+                <a:latin typeface="Courier New" pitchFamily="34" charset="0"/>
+                <a:ea typeface="Courier New" pitchFamily="34" charset="-122"/>
+                <a:cs typeface="Courier New" pitchFamily="34" charset="-120"/>
+              </a:rPr>
+              <a:t>=</a:t>
             </a:r>
             <a:r>
               <a:rPr lang="en-US" sz="1050" dirty="0">
@@ -13374,29 +13037,29 @@
                 <a:ea typeface="Courier New" pitchFamily="34" charset="-122"/>
                 <a:cs typeface="Courier New" pitchFamily="34" charset="-120"/>
               </a:rPr>
-              <a:t>=</a:t>
-            </a:r>
-            <a:r>
-              <a:rPr lang="en-US" sz="1050" dirty="0">
-                <a:solidFill>
-                  <a:srgbClr val="CCCCCC"/>
-                </a:solidFill>
-                <a:latin typeface="Courier New" pitchFamily="34" charset="0"/>
-                <a:ea typeface="Courier New" pitchFamily="34" charset="-122"/>
-                <a:cs typeface="Courier New" pitchFamily="34" charset="-120"/>
-              </a:rPr>
-              <a:t> </a:t>
-            </a:r>
-            <a:r>
-              <a:rPr lang="en-US" sz="1050" dirty="0">
-                <a:solidFill>
-                  <a:srgbClr val="CCCCCC"/>
-                </a:solidFill>
-                <a:latin typeface="Courier New" pitchFamily="34" charset="0"/>
-                <a:ea typeface="Courier New" pitchFamily="34" charset="-122"/>
-                <a:cs typeface="Courier New" pitchFamily="34" charset="-120"/>
-              </a:rPr>
-              <a:t>line-carrier_id</a:t>
+              <a:t>k-</a:t>
+            </a:r>
+            <a:r>
+              <a:rPr lang="en-US" sz="1050" dirty="0">
+                <a:solidFill>
+                  <a:srgbClr val="CCCCCC"/>
+                </a:solidFill>
+                <a:latin typeface="Courier New" pitchFamily="34" charset="0"/>
+                <a:ea typeface="Courier New" pitchFamily="34" charset="-122"/>
+                <a:cs typeface="Courier New" pitchFamily="34" charset="-120"/>
+              </a:rPr>
+              <a:t>%</a:t>
+            </a:r>
+            <a:r>
+              <a:rPr lang="en-US" sz="1050" dirty="0">
+                <a:solidFill>
+                  <a:srgbClr val="CCCCCC"/>
+                </a:solidFill>
+                <a:latin typeface="Courier New" pitchFamily="34" charset="0"/>
+                <a:ea typeface="Courier New" pitchFamily="34" charset="-122"/>
+                <a:cs typeface="Courier New" pitchFamily="34" charset="-120"/>
+              </a:rPr>
+              <a:t>is_draft</a:t>
             </a:r>
             <a:endParaRPr lang="en-US" sz="1050" dirty="0"/>
           </a:p>
@@ -13427,18 +13090,18 @@
                 <a:ea typeface="Courier New" pitchFamily="34" charset="-122"/>
                 <a:cs typeface="Courier New" pitchFamily="34" charset="-120"/>
               </a:rPr>
-              <a:t>route</a:t>
-            </a:r>
-            <a:r>
-              <a:rPr lang="en-US" sz="1050" dirty="0">
-                <a:solidFill>
-                  <a:srgbClr val="CCCCCC"/>
-                </a:solidFill>
-                <a:latin typeface="Courier New" pitchFamily="34" charset="0"/>
-                <a:ea typeface="Courier New" pitchFamily="34" charset="-122"/>
-                <a:cs typeface="Courier New" pitchFamily="34" charset="-120"/>
-              </a:rPr>
-              <a:t>      </a:t>
+              <a:t>pedido_uuid</a:t>
+            </a:r>
+            <a:r>
+              <a:rPr lang="en-US" sz="1050" dirty="0">
+                <a:solidFill>
+                  <a:srgbClr val="CCCCCC"/>
+                </a:solidFill>
+                <a:latin typeface="Courier New" pitchFamily="34" charset="0"/>
+                <a:ea typeface="Courier New" pitchFamily="34" charset="-122"/>
+                <a:cs typeface="Courier New" pitchFamily="34" charset="-120"/>
+              </a:rPr>
+              <a:t> </a:t>
             </a:r>
             <a:r>
               <a:rPr lang="en-US" sz="1050" dirty="0">
@@ -13465,13 +13128,13 @@
             <a:r>
               <a:rPr lang="en-US" sz="1050" dirty="0">
                 <a:solidFill>
-                  <a:srgbClr val="CE9178"/>
-                </a:solidFill>
-                <a:latin typeface="Courier New" pitchFamily="34" charset="0"/>
-                <a:ea typeface="Courier New" pitchFamily="34" charset="-122"/>
-                <a:cs typeface="Courier New" pitchFamily="34" charset="-120"/>
-              </a:rPr>
-              <a:t>|{ line-airport_from_id }-{ line-airport_to_id }|</a:t>
+                  <a:srgbClr val="CCCCCC"/>
+                </a:solidFill>
+                <a:latin typeface="Courier New" pitchFamily="34" charset="0"/>
+                <a:ea typeface="Courier New" pitchFamily="34" charset="-122"/>
+                <a:cs typeface="Courier New" pitchFamily="34" charset="-120"/>
+              </a:rPr>
+              <a:t>k-PedidoUUID</a:t>
             </a:r>
             <a:r>
               <a:rPr lang="en-US" sz="1050" dirty="0">
@@ -13608,7 +13271,7 @@
                 <a:ea typeface="Courier New" pitchFamily="34" charset="-122"/>
                 <a:cs typeface="Courier New" pitchFamily="34" charset="-120"/>
               </a:rPr>
-              <a:t>total_seats</a:t>
+              <a:t>total</a:t>
             </a:r>
             <a:r>
               <a:rPr lang="en-US" sz="1050" dirty="0">
@@ -13685,7 +13348,7 @@
                 <a:ea typeface="Courier New" pitchFamily="34" charset="-122"/>
                 <a:cs typeface="Courier New" pitchFamily="34" charset="-120"/>
               </a:rPr>
-              <a:t>i</a:t>
+              <a:t>zta_pc_pedido-valor_total</a:t>
             </a:r>
             <a:r>
               <a:rPr lang="en-US" sz="1050" dirty="0">
@@ -13749,7 +13412,7 @@
                 <a:ea typeface="Courier New" pitchFamily="34" charset="-122"/>
                 <a:cs typeface="Courier New" pitchFamily="34" charset="-120"/>
               </a:rPr>
-              <a:t>total</a:t>
+              <a:t>soma</a:t>
             </a:r>
             <a:r>
               <a:rPr lang="en-US" sz="1050" dirty="0">
@@ -13846,7 +13509,7 @@
                 <a:ea typeface="Courier New" pitchFamily="34" charset="-122"/>
                 <a:cs typeface="Courier New" pitchFamily="34" charset="-120"/>
               </a:rPr>
-              <a:t>flight</a:t>
+              <a:t>item</a:t>
             </a:r>
             <a:r>
               <a:rPr lang="en-US" sz="1050" dirty="0">
@@ -13890,7 +13553,139 @@
                 <a:ea typeface="Courier New" pitchFamily="34" charset="-122"/>
                 <a:cs typeface="Courier New" pitchFamily="34" charset="-120"/>
               </a:rPr>
-              <a:t>flights</a:t>
+              <a:t>itens</a:t>
+            </a:r>
+            <a:r>
+              <a:rPr lang="en-US" sz="1050" dirty="0">
+                <a:solidFill>
+                  <a:srgbClr val="CCCCCC"/>
+                </a:solidFill>
+                <a:latin typeface="Courier New" pitchFamily="34" charset="0"/>
+                <a:ea typeface="Courier New" pitchFamily="34" charset="-122"/>
+                <a:cs typeface="Courier New" pitchFamily="34" charset="-120"/>
+              </a:rPr>
+              <a:t> </a:t>
+            </a:r>
+            <a:r>
+              <a:rPr lang="en-US" sz="1050" dirty="0">
+                <a:solidFill>
+                  <a:srgbClr val="569CD6"/>
+                </a:solidFill>
+                <a:latin typeface="Courier New" pitchFamily="34" charset="0"/>
+                <a:ea typeface="Courier New" pitchFamily="34" charset="-122"/>
+                <a:cs typeface="Courier New" pitchFamily="34" charset="-120"/>
+              </a:rPr>
+              <a:t>WHERE</a:t>
+            </a:r>
+            <a:r>
+              <a:rPr lang="en-US" sz="1050" dirty="0">
+                <a:solidFill>
+                  <a:srgbClr val="CCCCCC"/>
+                </a:solidFill>
+                <a:latin typeface="Courier New" pitchFamily="34" charset="0"/>
+                <a:ea typeface="Courier New" pitchFamily="34" charset="-122"/>
+                <a:cs typeface="Courier New" pitchFamily="34" charset="-120"/>
+              </a:rPr>
+              <a:t> </a:t>
+            </a:r>
+            <a:r>
+              <a:rPr lang="en-US" sz="1050" dirty="0">
+                <a:solidFill>
+                  <a:srgbClr val="CCCCCC"/>
+                </a:solidFill>
+                <a:latin typeface="Courier New" pitchFamily="34" charset="0"/>
+                <a:ea typeface="Courier New" pitchFamily="34" charset="-122"/>
+                <a:cs typeface="Courier New" pitchFamily="34" charset="-120"/>
+              </a:rPr>
+              <a:t>(</a:t>
+            </a:r>
+            <a:r>
+              <a:rPr lang="en-US" sz="1050" dirty="0">
+                <a:solidFill>
+                  <a:srgbClr val="CCCCCC"/>
+                </a:solidFill>
+                <a:latin typeface="Courier New" pitchFamily="34" charset="0"/>
+                <a:ea typeface="Courier New" pitchFamily="34" charset="-122"/>
+                <a:cs typeface="Courier New" pitchFamily="34" charset="-120"/>
+              </a:rPr>
+              <a:t> </a:t>
+            </a:r>
+            <a:r>
+              <a:rPr lang="en-US" sz="1050" dirty="0">
+                <a:solidFill>
+                  <a:srgbClr val="CCCCCC"/>
+                </a:solidFill>
+                <a:latin typeface="Courier New" pitchFamily="34" charset="0"/>
+                <a:ea typeface="Courier New" pitchFamily="34" charset="-122"/>
+                <a:cs typeface="Courier New" pitchFamily="34" charset="-120"/>
+              </a:rPr>
+              <a:t>pedido_uuid</a:t>
+            </a:r>
+            <a:r>
+              <a:rPr lang="en-US" sz="1050" dirty="0">
+                <a:solidFill>
+                  <a:srgbClr val="CCCCCC"/>
+                </a:solidFill>
+                <a:latin typeface="Courier New" pitchFamily="34" charset="0"/>
+                <a:ea typeface="Courier New" pitchFamily="34" charset="-122"/>
+                <a:cs typeface="Courier New" pitchFamily="34" charset="-120"/>
+              </a:rPr>
+              <a:t> </a:t>
+            </a:r>
+            <a:r>
+              <a:rPr lang="en-US" sz="1050" dirty="0">
+                <a:solidFill>
+                  <a:srgbClr val="CCCCCC"/>
+                </a:solidFill>
+                <a:latin typeface="Courier New" pitchFamily="34" charset="0"/>
+                <a:ea typeface="Courier New" pitchFamily="34" charset="-122"/>
+                <a:cs typeface="Courier New" pitchFamily="34" charset="-120"/>
+              </a:rPr>
+              <a:t>=</a:t>
+            </a:r>
+            <a:r>
+              <a:rPr lang="en-US" sz="1050" dirty="0">
+                <a:solidFill>
+                  <a:srgbClr val="CCCCCC"/>
+                </a:solidFill>
+                <a:latin typeface="Courier New" pitchFamily="34" charset="0"/>
+                <a:ea typeface="Courier New" pitchFamily="34" charset="-122"/>
+                <a:cs typeface="Courier New" pitchFamily="34" charset="-120"/>
+              </a:rPr>
+              <a:t> </a:t>
+            </a:r>
+            <a:r>
+              <a:rPr lang="en-US" sz="1050" dirty="0">
+                <a:solidFill>
+                  <a:srgbClr val="CCCCCC"/>
+                </a:solidFill>
+                <a:latin typeface="Courier New" pitchFamily="34" charset="0"/>
+                <a:ea typeface="Courier New" pitchFamily="34" charset="-122"/>
+                <a:cs typeface="Courier New" pitchFamily="34" charset="-120"/>
+              </a:rPr>
+              <a:t>pedido</a:t>
+            </a:r>
+            <a:r>
+              <a:rPr lang="en-US" sz="1050" dirty="0">
+                <a:solidFill>
+                  <a:srgbClr val="CCCCCC"/>
+                </a:solidFill>
+                <a:latin typeface="Courier New" pitchFamily="34" charset="0"/>
+                <a:ea typeface="Courier New" pitchFamily="34" charset="-122"/>
+                <a:cs typeface="Courier New" pitchFamily="34" charset="-120"/>
+              </a:rPr>
+              <a:t> </a:t>
+            </a:r>
+            <a:r>
+              <a:rPr lang="en-US" sz="1050" dirty="0">
+                <a:solidFill>
+                  <a:srgbClr val="CCCCCC"/>
+                </a:solidFill>
+                <a:latin typeface="Courier New" pitchFamily="34" charset="0"/>
+                <a:ea typeface="Courier New" pitchFamily="34" charset="-122"/>
+                <a:cs typeface="Courier New" pitchFamily="34" charset="-120"/>
+              </a:rPr>
+              <a:t>)</a:t>
             </a:r>
             <a:endParaRPr lang="en-US" sz="1050" dirty="0"/>
           </a:p>
@@ -13943,7 +13738,7 @@
                 <a:ea typeface="Courier New" pitchFamily="34" charset="-122"/>
                 <a:cs typeface="Courier New" pitchFamily="34" charset="-120"/>
               </a:rPr>
-              <a:t>total</a:t>
+              <a:t>soma</a:t>
             </a:r>
             <a:r>
               <a:rPr lang="en-US" sz="1050" dirty="0">
@@ -13998,7 +13793,7 @@
                 <a:ea typeface="Courier New" pitchFamily="34" charset="-122"/>
                 <a:cs typeface="Courier New" pitchFamily="34" charset="-120"/>
               </a:rPr>
-              <a:t>flight-seats_occupied</a:t>
+              <a:t>item-valor_total</a:t>
             </a:r>
             <a:r>
               <a:rPr lang="en-US" sz="1050" dirty="0">
@@ -14113,7 +13908,7 @@
                 <a:ea typeface="Courier New" pitchFamily="34" charset="-122"/>
                 <a:cs typeface="Courier New" pitchFamily="34" charset="-120"/>
               </a:rPr>
-              <a:t>copy</a:t>
+              <a:t>copia</a:t>
             </a:r>
             <a:r>
               <a:rPr lang="en-US" sz="1050" dirty="0">
@@ -14190,7 +13985,7 @@
                 <a:ea typeface="Courier New" pitchFamily="34" charset="-122"/>
                 <a:cs typeface="Courier New" pitchFamily="34" charset="-120"/>
               </a:rPr>
-              <a:t>tt_targets</a:t>
+              <a:t>tt_itens_snapshot</a:t>
             </a:r>
             <a:r>
               <a:rPr lang="en-US" sz="1050" dirty="0">
@@ -14223,7 +14018,7 @@
                 <a:ea typeface="Courier New" pitchFamily="34" charset="-122"/>
                 <a:cs typeface="Courier New" pitchFamily="34" charset="-120"/>
               </a:rPr>
-              <a:t>connections</a:t>
+              <a:t>itens</a:t>
             </a:r>
             <a:r>
               <a:rPr lang="en-US" sz="1050" dirty="0">
@@ -14421,7 +14216,7 @@
                   <a:srgbClr val="556B82"/>
                 </a:solidFill>
               </a:rPr>
-              <a:t>.</a:t>
+              <a:t>. O BO Pedido monta assim os pedidos a recalcular.</a:t>
             </a:r>
             <a:endParaRPr lang="en-US" sz="1400" dirty="0"/>
           </a:p>
@@ -14947,7 +14742,7 @@
                   <a:srgbClr val="89D1FF"/>
                 </a:solidFill>
               </a:rPr>
-              <a:t>AULA 04.05 · SEÇÃO 2</a:t>
+              <a:t>AULA 02.05 · SEÇÃO 2</a:t>
             </a:r>
             <a:endParaRPr lang="en-US" sz="1300" dirty="0"/>
           </a:p>
@@ -15793,7 +15588,7 @@
                 <a:ea typeface="Courier New" pitchFamily="34" charset="-122"/>
                 <a:cs typeface="Courier New" pitchFamily="34" charset="-120"/>
               </a:rPr>
-              <a:t>flights</a:t>
+              <a:t>itens</a:t>
             </a:r>
             <a:r>
               <a:rPr lang="en-US" sz="1050" dirty="0">
@@ -15859,7 +15654,7 @@
                 <a:ea typeface="Courier New" pitchFamily="34" charset="-122"/>
                 <a:cs typeface="Courier New" pitchFamily="34" charset="-120"/>
               </a:rPr>
-              <a:t>flight</a:t>
+              <a:t>item</a:t>
             </a:r>
             <a:r>
               <a:rPr lang="en-US" sz="1050" dirty="0">
@@ -15912,7 +15707,7 @@
                 <a:ea typeface="Courier New" pitchFamily="34" charset="-122"/>
                 <a:cs typeface="Courier New" pitchFamily="34" charset="-120"/>
               </a:rPr>
-              <a:t>flight-price</a:t>
+              <a:t>item-valor_total</a:t>
             </a:r>
             <a:r>
               <a:rPr lang="en-US" sz="1050" dirty="0">
@@ -15956,7 +15751,7 @@
                 <a:ea typeface="Courier New" pitchFamily="34" charset="-122"/>
                 <a:cs typeface="Courier New" pitchFamily="34" charset="-120"/>
               </a:rPr>
-              <a:t>flight-price</a:t>
+              <a:t>item-qtde_item_pedido</a:t>
             </a:r>
             <a:r>
               <a:rPr lang="en-US" sz="1050" dirty="0">
@@ -15994,13 +15789,13 @@
             <a:r>
               <a:rPr lang="en-US" sz="1050" dirty="0">
                 <a:solidFill>
-                  <a:srgbClr val="CE9178"/>
-                </a:solidFill>
-                <a:latin typeface="Courier New" pitchFamily="34" charset="0"/>
-                <a:ea typeface="Courier New" pitchFamily="34" charset="-122"/>
-                <a:cs typeface="Courier New" pitchFamily="34" charset="-120"/>
-              </a:rPr>
-              <a:t>'1.1'</a:t>
+                  <a:srgbClr val="CCCCCC"/>
+                </a:solidFill>
+                <a:latin typeface="Courier New" pitchFamily="34" charset="0"/>
+                <a:ea typeface="Courier New" pitchFamily="34" charset="-122"/>
+                <a:cs typeface="Courier New" pitchFamily="34" charset="-120"/>
+              </a:rPr>
+              <a:t>item-preco_unitario_snap</a:t>
             </a:r>
             <a:r>
               <a:rPr lang="en-US" sz="1050" dirty="0">
@@ -16064,7 +15859,7 @@
                 <a:ea typeface="Courier New" pitchFamily="34" charset="-122"/>
                 <a:cs typeface="Courier New" pitchFamily="34" charset="-120"/>
               </a:rPr>
-              <a:t>flights</a:t>
+              <a:t>itens</a:t>
             </a:r>
             <a:r>
               <a:rPr lang="en-US" sz="1050" dirty="0">
@@ -16108,7 +15903,7 @@
                 <a:ea typeface="Courier New" pitchFamily="34" charset="-122"/>
                 <a:cs typeface="Courier New" pitchFamily="34" charset="-120"/>
               </a:rPr>
-              <a:t>flight</a:t>
+              <a:t>item</a:t>
             </a:r>
             <a:r>
               <a:rPr lang="en-US" sz="1050" dirty="0">
@@ -16556,7 +16351,7 @@
                 <a:ea typeface="Courier New" pitchFamily="34" charset="-122"/>
                 <a:cs typeface="Courier New" pitchFamily="34" charset="-120"/>
               </a:rPr>
-              <a:t>flights</a:t>
+              <a:t>itens</a:t>
             </a:r>
             <a:r>
               <a:rPr lang="en-US" sz="1050" dirty="0">
@@ -16633,7 +16428,7 @@
                 <a:ea typeface="Courier New" pitchFamily="34" charset="-122"/>
                 <a:cs typeface="Courier New" pitchFamily="34" charset="-120"/>
               </a:rPr>
-              <a:t>flight</a:t>
+              <a:t>item</a:t>
             </a:r>
             <a:r>
               <a:rPr lang="en-US" sz="1050" dirty="0">
@@ -16708,7 +16503,7 @@
                 <a:ea typeface="Courier New" pitchFamily="34" charset="-122"/>
                 <a:cs typeface="Courier New" pitchFamily="34" charset="-120"/>
               </a:rPr>
-              <a:t>flight</a:t>
+              <a:t>item</a:t>
             </a:r>
             <a:r>
               <a:rPr lang="en-US" sz="1050" dirty="0">
@@ -16741,7 +16536,7 @@
                 <a:ea typeface="Courier New" pitchFamily="34" charset="-122"/>
                 <a:cs typeface="Courier New" pitchFamily="34" charset="-120"/>
               </a:rPr>
-              <a:t>price</a:t>
+              <a:t>valor_total</a:t>
             </a:r>
             <a:r>
               <a:rPr lang="en-US" sz="1050" dirty="0">
@@ -16796,7 +16591,7 @@
                 <a:ea typeface="Courier New" pitchFamily="34" charset="-122"/>
                 <a:cs typeface="Courier New" pitchFamily="34" charset="-120"/>
               </a:rPr>
-              <a:t>flight</a:t>
+              <a:t>item</a:t>
             </a:r>
             <a:r>
               <a:rPr lang="en-US" sz="1050" dirty="0">
@@ -16829,7 +16624,7 @@
                 <a:ea typeface="Courier New" pitchFamily="34" charset="-122"/>
                 <a:cs typeface="Courier New" pitchFamily="34" charset="-120"/>
               </a:rPr>
-              <a:t>price</a:t>
+              <a:t>qtde_item_pedido</a:t>
             </a:r>
             <a:r>
               <a:rPr lang="en-US" sz="1050" dirty="0">
@@ -16867,13 +16662,57 @@
             <a:r>
               <a:rPr lang="en-US" sz="1050" dirty="0">
                 <a:solidFill>
-                  <a:srgbClr val="CE9178"/>
-                </a:solidFill>
-                <a:latin typeface="Courier New" pitchFamily="34" charset="0"/>
-                <a:ea typeface="Courier New" pitchFamily="34" charset="-122"/>
-                <a:cs typeface="Courier New" pitchFamily="34" charset="-120"/>
-              </a:rPr>
-              <a:t>'1.1'</a:t>
+                  <a:srgbClr val="CCCCCC"/>
+                </a:solidFill>
+                <a:latin typeface="Courier New" pitchFamily="34" charset="0"/>
+                <a:ea typeface="Courier New" pitchFamily="34" charset="-122"/>
+                <a:cs typeface="Courier New" pitchFamily="34" charset="-120"/>
+              </a:rPr>
+              <a:t>&lt;</a:t>
+            </a:r>
+            <a:r>
+              <a:rPr lang="en-US" sz="1050" dirty="0">
+                <a:solidFill>
+                  <a:srgbClr val="CCCCCC"/>
+                </a:solidFill>
+                <a:latin typeface="Courier New" pitchFamily="34" charset="0"/>
+                <a:ea typeface="Courier New" pitchFamily="34" charset="-122"/>
+                <a:cs typeface="Courier New" pitchFamily="34" charset="-120"/>
+              </a:rPr>
+              <a:t>item</a:t>
+            </a:r>
+            <a:r>
+              <a:rPr lang="en-US" sz="1050" dirty="0">
+                <a:solidFill>
+                  <a:srgbClr val="CCCCCC"/>
+                </a:solidFill>
+                <a:latin typeface="Courier New" pitchFamily="34" charset="0"/>
+                <a:ea typeface="Courier New" pitchFamily="34" charset="-122"/>
+                <a:cs typeface="Courier New" pitchFamily="34" charset="-120"/>
+              </a:rPr>
+              <a:t>&gt;</a:t>
+            </a:r>
+            <a:r>
+              <a:rPr lang="en-US" sz="1050" dirty="0">
+                <a:solidFill>
+                  <a:srgbClr val="CCCCCC"/>
+                </a:solidFill>
+                <a:latin typeface="Courier New" pitchFamily="34" charset="0"/>
+                <a:ea typeface="Courier New" pitchFamily="34" charset="-122"/>
+                <a:cs typeface="Courier New" pitchFamily="34" charset="-120"/>
+              </a:rPr>
+              <a:t>-</a:t>
+            </a:r>
+            <a:r>
+              <a:rPr lang="en-US" sz="1050" dirty="0">
+                <a:solidFill>
+                  <a:srgbClr val="CCCCCC"/>
+                </a:solidFill>
+                <a:latin typeface="Courier New" pitchFamily="34" charset="0"/>
+                <a:ea typeface="Courier New" pitchFamily="34" charset="-122"/>
+                <a:cs typeface="Courier New" pitchFamily="34" charset="-120"/>
+              </a:rPr>
+              <a:t>preco_unitario_snap</a:t>
             </a:r>
             <a:r>
               <a:rPr lang="en-US" sz="1050" dirty="0">
@@ -16954,7 +16793,7 @@
                 <a:ea typeface="Courier New" pitchFamily="34" charset="-122"/>
                 <a:cs typeface="Courier New" pitchFamily="34" charset="-120"/>
               </a:rPr>
-              <a:t>&lt;flight&gt;</a:t>
+              <a:t>&lt;item&gt;</a:t>
             </a:r>
             <a:r>
               <a:rPr lang="en-US" sz="1200" dirty="0">
@@ -17106,7 +16945,7 @@
                   <a:srgbClr val="89D1FF"/>
                 </a:solidFill>
               </a:rPr>
-              <a:t>AULA 04.05 · SEÇÃO 3</a:t>
+              <a:t>AULA 02.05 · SEÇÃO 3</a:t>
             </a:r>
             <a:endParaRPr lang="en-US" sz="1300" dirty="0"/>
           </a:p>
